--- a/index/designs/y8-l7/l6-zhengzai/l6-zhengzai.pptx
+++ b/index/designs/y8-l7/l6-zhengzai/l6-zhengzai.pptx
@@ -2128,9 +2128,6 @@
               </a:rPr>
               <a:t>⏱ </a:t>
             </a:r>
-            <a:pPr algn="l" indent="0" marL="0">
-              <a:buNone/>
-            </a:pPr>
             <a:r>
               <a:rPr lang="en-US" sz="1100" b="1" dirty="0">
                 <a:solidFill>
@@ -2217,9 +2214,6 @@
               </a:rPr>
               <a:t>📚 </a:t>
             </a:r>
-            <a:pPr algn="l" indent="0" marL="0">
-              <a:buNone/>
-            </a:pPr>
             <a:r>
               <a:rPr lang="en-US" sz="1100" b="1" dirty="0">
                 <a:solidFill>
@@ -2306,9 +2300,6 @@
               </a:rPr>
               <a:t>🎯 </a:t>
             </a:r>
-            <a:pPr algn="l" indent="0" marL="0">
-              <a:buNone/>
-            </a:pPr>
             <a:r>
               <a:rPr lang="en-US" sz="1100" b="1" dirty="0">
                 <a:solidFill>
@@ -5027,12 +5018,6 @@
               </a:rPr>
               <a:t>Form </a:t>
             </a:r>
-            <a:pPr algn="l" indent="0" marL="0">
-              <a:lnSpc>
-                <a:spcPts val="1485"/>
-              </a:lnSpc>
-              <a:buNone/>
-            </a:pPr>
             <a:r>
               <a:rPr lang="en-US" sz="1100" b="1" dirty="0">
                 <a:solidFill>
@@ -5044,12 +5029,6 @@
               </a:rPr>
               <a:t>正在 + verb</a:t>
             </a:r>
-            <a:pPr algn="l" indent="0" marL="0">
-              <a:lnSpc>
-                <a:spcPts val="1485"/>
-              </a:lnSpc>
-              <a:buNone/>
-            </a:pPr>
             <a:r>
               <a:rPr lang="en-US" sz="1100" dirty="0">
                 <a:solidFill>
@@ -5201,12 +5180,6 @@
               </a:rPr>
               <a:t>Ask </a:t>
             </a:r>
-            <a:pPr algn="l" indent="0" marL="0">
-              <a:lnSpc>
-                <a:spcPts val="1485"/>
-              </a:lnSpc>
-              <a:buNone/>
-            </a:pPr>
             <a:r>
               <a:rPr lang="en-US" sz="1100" b="1" dirty="0">
                 <a:solidFill>
@@ -5218,12 +5191,6 @@
               </a:rPr>
               <a:t>你正在……吗？</a:t>
             </a:r>
-            <a:pPr algn="l" indent="0" marL="0">
-              <a:lnSpc>
-                <a:spcPts val="1485"/>
-              </a:lnSpc>
-              <a:buNone/>
-            </a:pPr>
             <a:r>
               <a:rPr lang="en-US" sz="1100" dirty="0">
                 <a:solidFill>
@@ -5235,12 +5202,6 @@
               </a:rPr>
               <a:t> and answer </a:t>
             </a:r>
-            <a:pPr algn="l" indent="0" marL="0">
-              <a:lnSpc>
-                <a:spcPts val="1485"/>
-              </a:lnSpc>
-              <a:buNone/>
-            </a:pPr>
             <a:r>
               <a:rPr lang="en-US" sz="1100" b="1" dirty="0">
                 <a:solidFill>
@@ -5369,12 +5330,6 @@
               </a:rPr>
               <a:t>Use </a:t>
             </a:r>
-            <a:pPr algn="l" indent="0" marL="0">
-              <a:lnSpc>
-                <a:spcPts val="1485"/>
-              </a:lnSpc>
-              <a:buNone/>
-            </a:pPr>
             <a:r>
               <a:rPr lang="en-US" sz="1100" b="1" dirty="0">
                 <a:solidFill>
@@ -5386,12 +5341,6 @@
               </a:rPr>
               <a:t>正在</a:t>
             </a:r>
-            <a:pPr algn="l" indent="0" marL="0">
-              <a:lnSpc>
-                <a:spcPts val="1485"/>
-              </a:lnSpc>
-              <a:buNone/>
-            </a:pPr>
             <a:r>
               <a:rPr lang="en-US" sz="1100" dirty="0">
                 <a:solidFill>
@@ -6137,15 +6086,6 @@
               </a:rPr>
               <a:t>Write </a:t>
             </a:r>
-            <a:pPr algn="l" indent="0" marL="0">
-              <a:lnSpc>
-                <a:spcPts val="1885"/>
-              </a:lnSpc>
-              <a:spcAft>
-                <a:spcPts val="400"/>
-              </a:spcAft>
-              <a:buNone/>
-            </a:pPr>
             <a:r>
               <a:rPr lang="en-US" sz="1300" b="1" dirty="0">
                 <a:solidFill>
@@ -6157,15 +6097,6 @@
               </a:rPr>
               <a:t>2</a:t>
             </a:r>
-            <a:pPr algn="l" indent="0" marL="0">
-              <a:lnSpc>
-                <a:spcPts val="1885"/>
-              </a:lnSpc>
-              <a:spcAft>
-                <a:spcPts val="400"/>
-              </a:spcAft>
-              <a:buNone/>
-            </a:pPr>
             <a:r>
               <a:rPr lang="en-US" sz="1300" dirty="0">
                 <a:solidFill>
@@ -6177,15 +6108,6 @@
               </a:rPr>
               <a:t> sentences using </a:t>
             </a:r>
-            <a:pPr algn="l" indent="0" marL="0">
-              <a:lnSpc>
-                <a:spcPts val="1885"/>
-              </a:lnSpc>
-              <a:spcAft>
-                <a:spcPts val="400"/>
-              </a:spcAft>
-              <a:buNone/>
-            </a:pPr>
             <a:r>
               <a:rPr lang="en-US" sz="1300" b="1" dirty="0">
                 <a:solidFill>
@@ -6197,15 +6119,6 @@
               </a:rPr>
               <a:t>正在</a:t>
             </a:r>
-            <a:pPr algn="l" indent="0" marL="0">
-              <a:lnSpc>
-                <a:spcPts val="1885"/>
-              </a:lnSpc>
-              <a:spcAft>
-                <a:spcPts val="400"/>
-              </a:spcAft>
-              <a:buNone/>
-            </a:pPr>
             <a:r>
               <a:rPr lang="en-US" sz="1300" dirty="0">
                 <a:solidFill>
@@ -6217,15 +6130,6 @@
               </a:rPr>
               <a:t>: ① One about </a:t>
             </a:r>
-            <a:pPr algn="l" indent="0" marL="0">
-              <a:lnSpc>
-                <a:spcPts val="1885"/>
-              </a:lnSpc>
-              <a:spcAft>
-                <a:spcPts val="400"/>
-              </a:spcAft>
-              <a:buNone/>
-            </a:pPr>
             <a:r>
               <a:rPr lang="en-US" sz="1300" b="1" dirty="0">
                 <a:solidFill>
@@ -6237,15 +6141,6 @@
               </a:rPr>
               <a:t>yourself right now</a:t>
             </a:r>
-            <a:pPr algn="l" indent="0" marL="0">
-              <a:lnSpc>
-                <a:spcPts val="1885"/>
-              </a:lnSpc>
-              <a:spcAft>
-                <a:spcPts val="400"/>
-              </a:spcAft>
-              <a:buNone/>
-            </a:pPr>
             <a:r>
               <a:rPr lang="en-US" sz="1300" dirty="0">
                 <a:solidFill>
@@ -6257,15 +6152,6 @@
               </a:rPr>
               <a:t> ② One about </a:t>
             </a:r>
-            <a:pPr algn="l" indent="0" marL="0">
-              <a:lnSpc>
-                <a:spcPts val="1885"/>
-              </a:lnSpc>
-              <a:spcAft>
-                <a:spcPts val="400"/>
-              </a:spcAft>
-              <a:buNone/>
-            </a:pPr>
             <a:r>
               <a:rPr lang="en-US" sz="1300" b="1" dirty="0">
                 <a:solidFill>
@@ -6907,15 +6793,6 @@
               </a:rPr>
               <a:t>油画儿、水彩画儿，我</a:t>
             </a:r>
-            <a:pPr algn="l" indent="0" marL="0">
-              <a:lnSpc>
-                <a:spcPts val="3640"/>
-              </a:lnSpc>
-              <a:spcAft>
-                <a:spcPts val="500"/>
-              </a:spcAft>
-              <a:buNone/>
-            </a:pPr>
             <a:r>
               <a:rPr lang="en-US" sz="2800" b="1" dirty="0">
                 <a:solidFill>
@@ -6927,15 +6804,6 @@
               </a:rPr>
               <a:t>都</a:t>
             </a:r>
-            <a:pPr algn="l" indent="0" marL="0">
-              <a:lnSpc>
-                <a:spcPts val="3640"/>
-              </a:lnSpc>
-              <a:spcAft>
-                <a:spcPts val="500"/>
-              </a:spcAft>
-              <a:buNone/>
-            </a:pPr>
             <a:r>
               <a:rPr lang="en-US" sz="2800" dirty="0">
                 <a:solidFill>
@@ -7135,9 +7003,6 @@
               </a:rPr>
               <a:t>Today: </a:t>
             </a:r>
-            <a:pPr algn="l" indent="0" marL="0">
-              <a:buNone/>
-            </a:pPr>
             <a:r>
               <a:rPr lang="en-US" sz="1000" b="1" dirty="0">
                 <a:solidFill>
@@ -7149,9 +7014,6 @@
               </a:rPr>
               <a:t>正在</a:t>
             </a:r>
-            <a:pPr algn="l" indent="0" marL="0">
-              <a:buNone/>
-            </a:pPr>
             <a:r>
               <a:rPr lang="en-US" sz="1000" dirty="0">
                 <a:solidFill>
@@ -7238,9 +7100,6 @@
               </a:rPr>
               <a:t>Next: </a:t>
             </a:r>
-            <a:pPr algn="l" indent="0" marL="0">
-              <a:buNone/>
-            </a:pPr>
             <a:r>
               <a:rPr lang="en-US" sz="1000" b="1" dirty="0">
                 <a:solidFill>
@@ -7252,9 +7111,6 @@
               </a:rPr>
               <a:t>都</a:t>
             </a:r>
-            <a:pPr algn="l" indent="0" marL="0">
-              <a:buNone/>
-            </a:pPr>
             <a:r>
               <a:rPr lang="en-US" sz="1000" dirty="0">
                 <a:solidFill>
@@ -9048,12 +8904,6 @@
               </a:rPr>
               <a:t>我</a:t>
             </a:r>
-            <a:pPr algn="l" indent="0" marL="0">
-              <a:spcAft>
-                <a:spcPts val="400"/>
-              </a:spcAft>
-              <a:buNone/>
-            </a:pPr>
             <a:r>
               <a:rPr lang="en-US" sz="2200" b="1" dirty="0">
                 <a:solidFill>
@@ -9065,12 +8915,6 @@
               </a:rPr>
               <a:t>正在</a:t>
             </a:r>
-            <a:pPr algn="l" indent="0" marL="0">
-              <a:spcAft>
-                <a:spcPts val="400"/>
-              </a:spcAft>
-              <a:buNone/>
-            </a:pPr>
             <a:r>
               <a:rPr lang="en-US" sz="2200" dirty="0">
                 <a:solidFill>
@@ -9124,12 +8968,6 @@
               </a:rPr>
               <a:t>What do you think 正在 means?</a:t>
             </a:r>
-            <a:pPr algn="l" indent="0" marL="0">
-              <a:lnSpc>
-                <a:spcPts val="1540"/>
-              </a:lnSpc>
-              <a:buNone/>
-            </a:pPr>
             <a:r>
               <a:rPr lang="en-US" sz="1100" dirty="0">
                 <a:solidFill>
@@ -9600,12 +9438,6 @@
               </a:rPr>
               <a:t>We are learning to describe actions </a:t>
             </a:r>
-            <a:pPr algn="l" indent="0" marL="0">
-              <a:lnSpc>
-                <a:spcPts val="2380"/>
-              </a:lnSpc>
-              <a:buNone/>
-            </a:pPr>
             <a:r>
               <a:rPr lang="en-US" sz="1700" b="1" dirty="0">
                 <a:solidFill>
@@ -9617,12 +9449,6 @@
               </a:rPr>
               <a:t>happening right now</a:t>
             </a:r>
-            <a:pPr algn="l" indent="0" marL="0">
-              <a:lnSpc>
-                <a:spcPts val="2380"/>
-              </a:lnSpc>
-              <a:buNone/>
-            </a:pPr>
             <a:r>
               <a:rPr lang="en-US" sz="1700" dirty="0">
                 <a:solidFill>
@@ -9634,12 +9460,6 @@
               </a:rPr>
               <a:t> using </a:t>
             </a:r>
-            <a:pPr algn="l" indent="0" marL="0">
-              <a:lnSpc>
-                <a:spcPts val="2380"/>
-              </a:lnSpc>
-              <a:buNone/>
-            </a:pPr>
             <a:r>
               <a:rPr lang="en-US" sz="1700" b="1" dirty="0">
                 <a:solidFill>
@@ -9651,12 +9471,6 @@
               </a:rPr>
               <a:t>正在</a:t>
             </a:r>
-            <a:pPr algn="l" indent="0" marL="0">
-              <a:lnSpc>
-                <a:spcPts val="2380"/>
-              </a:lnSpc>
-              <a:buNone/>
-            </a:pPr>
             <a:r>
               <a:rPr lang="en-US" sz="1700" dirty="0">
                 <a:solidFill>
@@ -9823,12 +9637,6 @@
               </a:rPr>
               <a:t>I can form </a:t>
             </a:r>
-            <a:pPr algn="l" indent="0" marL="0">
-              <a:lnSpc>
-                <a:spcPts val="1885"/>
-              </a:lnSpc>
-              <a:buNone/>
-            </a:pPr>
             <a:r>
               <a:rPr lang="en-US" sz="1300" b="1" dirty="0">
                 <a:solidFill>
@@ -9840,12 +9648,6 @@
               </a:rPr>
               <a:t>正在 + verb</a:t>
             </a:r>
-            <a:pPr algn="l" indent="0" marL="0">
-              <a:lnSpc>
-                <a:spcPts val="1885"/>
-              </a:lnSpc>
-              <a:buNone/>
-            </a:pPr>
             <a:r>
               <a:rPr lang="en-US" sz="1300" dirty="0">
                 <a:solidFill>
@@ -9857,12 +9659,6 @@
               </a:rPr>
               <a:t> sentences → </a:t>
             </a:r>
-            <a:pPr algn="l" indent="0" marL="0">
-              <a:lnSpc>
-                <a:spcPts val="1885"/>
-              </a:lnSpc>
-              <a:buNone/>
-            </a:pPr>
             <a:r>
               <a:rPr lang="en-US" sz="1300" b="1" dirty="0">
                 <a:solidFill>
@@ -9987,12 +9783,6 @@
               </a:rPr>
               <a:t>I can ask and answer </a:t>
             </a:r>
-            <a:pPr algn="l" indent="0" marL="0">
-              <a:lnSpc>
-                <a:spcPts val="1885"/>
-              </a:lnSpc>
-              <a:buNone/>
-            </a:pPr>
             <a:r>
               <a:rPr lang="en-US" sz="1300" b="1" dirty="0">
                 <a:solidFill>
@@ -10004,12 +9794,6 @@
               </a:rPr>
               <a:t>你正在……吗？</a:t>
             </a:r>
-            <a:pPr algn="l" indent="0" marL="0">
-              <a:lnSpc>
-                <a:spcPts val="1885"/>
-              </a:lnSpc>
-              <a:buNone/>
-            </a:pPr>
             <a:r>
               <a:rPr lang="en-US" sz="1300" dirty="0">
                 <a:solidFill>
@@ -10021,12 +9805,6 @@
               </a:rPr>
               <a:t> </a:t>
             </a:r>
-            <a:pPr algn="l" indent="0" marL="0">
-              <a:lnSpc>
-                <a:spcPts val="1885"/>
-              </a:lnSpc>
-              <a:buNone/>
-            </a:pPr>
             <a:r>
               <a:rPr lang="en-US" sz="1300" b="1" dirty="0">
                 <a:solidFill>
@@ -10038,12 +9816,6 @@
               </a:rPr>
               <a:t>/</a:t>
             </a:r>
-            <a:pPr algn="l" indent="0" marL="0">
-              <a:lnSpc>
-                <a:spcPts val="1885"/>
-              </a:lnSpc>
-              <a:buNone/>
-            </a:pPr>
             <a:r>
               <a:rPr lang="en-US" sz="1300" dirty="0">
                 <a:solidFill>
@@ -10055,12 +9827,6 @@
               </a:rPr>
               <a:t> </a:t>
             </a:r>
-            <a:pPr algn="l" indent="0" marL="0">
-              <a:lnSpc>
-                <a:spcPts val="1885"/>
-              </a:lnSpc>
-              <a:buNone/>
-            </a:pPr>
             <a:r>
               <a:rPr lang="en-US" sz="1300" b="1" dirty="0">
                 <a:solidFill>
@@ -10185,12 +9951,6 @@
               </a:rPr>
               <a:t>I can use </a:t>
             </a:r>
-            <a:pPr algn="l" indent="0" marL="0">
-              <a:lnSpc>
-                <a:spcPts val="1885"/>
-              </a:lnSpc>
-              <a:buNone/>
-            </a:pPr>
             <a:r>
               <a:rPr lang="en-US" sz="1300" b="1" dirty="0">
                 <a:solidFill>
@@ -10202,12 +9962,6 @@
               </a:rPr>
               <a:t>正在</a:t>
             </a:r>
-            <a:pPr algn="l" indent="0" marL="0">
-              <a:lnSpc>
-                <a:spcPts val="1885"/>
-              </a:lnSpc>
-              <a:buNone/>
-            </a:pPr>
             <a:r>
               <a:rPr lang="en-US" sz="1300" dirty="0">
                 <a:solidFill>
@@ -10219,12 +9973,6 @@
               </a:rPr>
               <a:t> in a partner dialogue about what people are doing </a:t>
             </a:r>
-            <a:pPr algn="l" indent="0" marL="0">
-              <a:lnSpc>
-                <a:spcPts val="1885"/>
-              </a:lnSpc>
-              <a:buNone/>
-            </a:pPr>
             <a:r>
               <a:rPr lang="en-US" sz="1300" b="1" dirty="0">
                 <a:solidFill>
@@ -11355,9 +11103,6 @@
               </a:rPr>
               <a:t>他</a:t>
             </a:r>
-            <a:pPr algn="l" indent="0" marL="0">
-              <a:buNone/>
-            </a:pPr>
             <a:r>
               <a:rPr lang="en-US" sz="1600" b="1" dirty="0">
                 <a:solidFill>
@@ -11369,9 +11114,6 @@
               </a:rPr>
               <a:t>正在</a:t>
             </a:r>
-            <a:pPr algn="l" indent="0" marL="0">
-              <a:buNone/>
-            </a:pPr>
             <a:r>
               <a:rPr lang="en-US" sz="1600" dirty="0">
                 <a:solidFill>
@@ -11497,9 +11239,6 @@
               </a:rPr>
               <a:t>她</a:t>
             </a:r>
-            <a:pPr algn="l" indent="0" marL="0">
-              <a:buNone/>
-            </a:pPr>
             <a:r>
               <a:rPr lang="en-US" sz="1600" b="1" dirty="0">
                 <a:solidFill>
@@ -11511,9 +11250,6 @@
               </a:rPr>
               <a:t>正在</a:t>
             </a:r>
-            <a:pPr algn="l" indent="0" marL="0">
-              <a:buNone/>
-            </a:pPr>
             <a:r>
               <a:rPr lang="en-US" sz="1600" dirty="0">
                 <a:solidFill>
@@ -11639,9 +11375,6 @@
               </a:rPr>
               <a:t>你</a:t>
             </a:r>
-            <a:pPr algn="l" indent="0" marL="0">
-              <a:buNone/>
-            </a:pPr>
             <a:r>
               <a:rPr lang="en-US" sz="1600" b="1" dirty="0">
                 <a:solidFill>
@@ -11653,9 +11386,6 @@
               </a:rPr>
               <a:t>正在</a:t>
             </a:r>
-            <a:pPr algn="l" indent="0" marL="0">
-              <a:buNone/>
-            </a:pPr>
             <a:r>
               <a:rPr lang="en-US" sz="1600" dirty="0">
                 <a:solidFill>
@@ -11781,9 +11511,6 @@
               </a:rPr>
               <a:t>你们</a:t>
             </a:r>
-            <a:pPr algn="l" indent="0" marL="0">
-              <a:buNone/>
-            </a:pPr>
             <a:r>
               <a:rPr lang="en-US" sz="1600" b="1" dirty="0">
                 <a:solidFill>
@@ -11795,9 +11522,6 @@
               </a:rPr>
               <a:t>正在</a:t>
             </a:r>
-            <a:pPr algn="l" indent="0" marL="0">
-              <a:buNone/>
-            </a:pPr>
             <a:r>
               <a:rPr lang="en-US" sz="1600" dirty="0">
                 <a:solidFill>
@@ -12798,12 +12522,6 @@
               </a:rPr>
               <a:t>他</a:t>
             </a:r>
-            <a:pPr algn="l" indent="0" marL="0">
-              <a:lnSpc>
-                <a:spcPts val="2520"/>
-              </a:lnSpc>
-              <a:buNone/>
-            </a:pPr>
             <a:r>
               <a:rPr lang="en-US" sz="1800" b="1" dirty="0">
                 <a:solidFill>
@@ -12815,12 +12533,6 @@
               </a:rPr>
               <a:t>喜欢</a:t>
             </a:r>
-            <a:pPr algn="l" indent="0" marL="0">
-              <a:lnSpc>
-                <a:spcPts val="2520"/>
-              </a:lnSpc>
-              <a:buNone/>
-            </a:pPr>
             <a:r>
               <a:rPr lang="en-US" sz="1800" dirty="0">
                 <a:solidFill>
@@ -13231,12 +12943,6 @@
               </a:rPr>
               <a:t>他</a:t>
             </a:r>
-            <a:pPr algn="l" indent="0" marL="0">
-              <a:lnSpc>
-                <a:spcPts val="2520"/>
-              </a:lnSpc>
-              <a:buNone/>
-            </a:pPr>
             <a:r>
               <a:rPr lang="en-US" sz="1800" b="1" dirty="0">
                 <a:solidFill>
@@ -13248,12 +12954,6 @@
               </a:rPr>
               <a:t>正在</a:t>
             </a:r>
-            <a:pPr algn="l" indent="0" marL="0">
-              <a:lnSpc>
-                <a:spcPts val="2520"/>
-              </a:lnSpc>
-              <a:buNone/>
-            </a:pPr>
             <a:r>
               <a:rPr lang="en-US" sz="1800" dirty="0">
                 <a:solidFill>
@@ -15288,9 +14988,6 @@
               </a:rPr>
               <a:t>他正在弹</a:t>
             </a:r>
-            <a:pPr algn="l" indent="0" marL="0">
-              <a:buNone/>
-            </a:pPr>
             <a:r>
               <a:rPr lang="en-US" sz="2000" b="1" dirty="0">
                 <a:solidFill>
@@ -15302,9 +14999,6 @@
               </a:rPr>
               <a:t>了</a:t>
             </a:r>
-            <a:pPr algn="l" indent="0" marL="0">
-              <a:buNone/>
-            </a:pPr>
             <a:r>
               <a:rPr lang="en-US" sz="2000" dirty="0">
                 <a:solidFill>
@@ -15924,9 +15618,6 @@
               </a:rPr>
               <a:t>A · 他</a:t>
             </a:r>
-            <a:pPr algn="l" indent="0" marL="0">
-              <a:buNone/>
-            </a:pPr>
             <a:r>
               <a:rPr lang="en-US" sz="1800" b="1" dirty="0">
                 <a:solidFill>
@@ -15938,9 +15629,6 @@
               </a:rPr>
               <a:t>喜欢</a:t>
             </a:r>
-            <a:pPr algn="l" indent="0" marL="0">
-              <a:buNone/>
-            </a:pPr>
             <a:r>
               <a:rPr lang="en-US" sz="1800" dirty="0">
                 <a:solidFill>
@@ -15994,12 +15682,6 @@
               </a:rPr>
               <a:t>喜欢</a:t>
             </a:r>
-            <a:pPr algn="l" indent="0" marL="0">
-              <a:lnSpc>
-                <a:spcPts val="1450"/>
-              </a:lnSpc>
-              <a:buNone/>
-            </a:pPr>
             <a:r>
               <a:rPr lang="en-US" sz="1000" dirty="0">
                 <a:solidFill>
@@ -16011,12 +15693,6 @@
               </a:rPr>
               <a:t> = habitual/general preference — not tied to right now. B (他</a:t>
             </a:r>
-            <a:pPr algn="l" indent="0" marL="0">
-              <a:lnSpc>
-                <a:spcPts val="1450"/>
-              </a:lnSpc>
-              <a:buNone/>
-            </a:pPr>
             <a:r>
               <a:rPr lang="en-US" sz="1000" b="1" dirty="0">
                 <a:solidFill>
@@ -16028,12 +15704,6 @@
               </a:rPr>
               <a:t>正在</a:t>
             </a:r>
-            <a:pPr algn="l" indent="0" marL="0">
-              <a:lnSpc>
-                <a:spcPts val="1450"/>
-              </a:lnSpc>
-              <a:buNone/>
-            </a:pPr>
             <a:r>
               <a:rPr lang="en-US" sz="1000" dirty="0">
                 <a:solidFill>
@@ -16045,12 +15715,6 @@
               </a:rPr>
               <a:t>弹钢琴) means he is playing piano </a:t>
             </a:r>
-            <a:pPr algn="l" indent="0" marL="0">
-              <a:lnSpc>
-                <a:spcPts val="1450"/>
-              </a:lnSpc>
-              <a:buNone/>
-            </a:pPr>
             <a:r>
               <a:rPr lang="en-US" sz="1000" b="1" dirty="0">
                 <a:solidFill>
@@ -16062,12 +15726,6 @@
               </a:rPr>
               <a:t>at this exact moment</a:t>
             </a:r>
-            <a:pPr algn="l" indent="0" marL="0">
-              <a:lnSpc>
-                <a:spcPts val="1450"/>
-              </a:lnSpc>
-              <a:buNone/>
-            </a:pPr>
             <a:r>
               <a:rPr lang="en-US" sz="1000" dirty="0">
                 <a:solidFill>
@@ -16306,9 +15964,6 @@
               </a:rPr>
               <a:t>她</a:t>
             </a:r>
-            <a:pPr algn="l" indent="0" marL="0">
-              <a:buNone/>
-            </a:pPr>
             <a:r>
               <a:rPr lang="en-US" sz="1800" b="1" dirty="0">
                 <a:solidFill>
@@ -16320,9 +15975,6 @@
               </a:rPr>
               <a:t>正在</a:t>
             </a:r>
-            <a:pPr algn="l" indent="0" marL="0">
-              <a:buNone/>
-            </a:pPr>
             <a:r>
               <a:rPr lang="en-US" sz="1800" dirty="0">
                 <a:solidFill>
@@ -16376,12 +16028,6 @@
               </a:rPr>
               <a:t>正在</a:t>
             </a:r>
-            <a:pPr algn="l" indent="0" marL="0">
-              <a:lnSpc>
-                <a:spcPts val="1450"/>
-              </a:lnSpc>
-              <a:buNone/>
-            </a:pPr>
             <a:r>
               <a:rPr lang="en-US" sz="1000" dirty="0">
                 <a:solidFill>
@@ -16542,12 +16188,6 @@
               </a:rPr>
               <a:t>What's wrong? 他正在弹</a:t>
             </a:r>
-            <a:pPr algn="l" indent="0" marL="0">
-              <a:spcAft>
-                <a:spcPts val="500"/>
-              </a:spcAft>
-              <a:buNone/>
-            </a:pPr>
             <a:r>
               <a:rPr lang="en-US" sz="800" b="1" i="1" dirty="0">
                 <a:solidFill>
@@ -16559,12 +16199,6 @@
               </a:rPr>
               <a:t>【了】</a:t>
             </a:r>
-            <a:pPr algn="l" indent="0" marL="0">
-              <a:spcAft>
-                <a:spcPts val="500"/>
-              </a:spcAft>
-              <a:buNone/>
-            </a:pPr>
             <a:r>
               <a:rPr lang="en-US" sz="1000" dirty="0">
                 <a:solidFill>
@@ -16654,9 +16288,6 @@
               </a:rPr>
               <a:t>Remove </a:t>
             </a:r>
-            <a:pPr algn="l" indent="0" marL="0">
-              <a:buNone/>
-            </a:pPr>
             <a:r>
               <a:rPr lang="en-US" sz="1500" b="1" dirty="0">
                 <a:solidFill>
@@ -16668,9 +16299,6 @@
               </a:rPr>
               <a:t>了</a:t>
             </a:r>
-            <a:pPr algn="l" indent="0" marL="0">
-              <a:buNone/>
-            </a:pPr>
             <a:r>
               <a:rPr lang="en-US" sz="1500" dirty="0">
                 <a:solidFill>
@@ -16724,12 +16352,6 @@
               </a:rPr>
               <a:t>了</a:t>
             </a:r>
-            <a:pPr algn="l" indent="0" marL="0">
-              <a:lnSpc>
-                <a:spcPts val="1450"/>
-              </a:lnSpc>
-              <a:buNone/>
-            </a:pPr>
             <a:r>
               <a:rPr lang="en-US" sz="1000" dirty="0">
                 <a:solidFill>
@@ -16741,12 +16363,6 @@
               </a:rPr>
               <a:t> marks completed actions (past/change of state). It clashes with </a:t>
             </a:r>
-            <a:pPr algn="l" indent="0" marL="0">
-              <a:lnSpc>
-                <a:spcPts val="1450"/>
-              </a:lnSpc>
-              <a:buNone/>
-            </a:pPr>
             <a:r>
               <a:rPr lang="en-US" sz="1000" b="1" dirty="0">
                 <a:solidFill>
@@ -16758,12 +16374,6 @@
               </a:rPr>
               <a:t>正在</a:t>
             </a:r>
-            <a:pPr algn="l" indent="0" marL="0">
-              <a:lnSpc>
-                <a:spcPts val="1450"/>
-              </a:lnSpc>
-              <a:buNone/>
-            </a:pPr>
             <a:r>
               <a:rPr lang="en-US" sz="1000" dirty="0">
                 <a:solidFill>
@@ -18544,9 +18154,6 @@
               </a:rPr>
               <a:t>他 / 她 </a:t>
             </a:r>
-            <a:pPr algn="l" indent="0" marL="0">
-              <a:buNone/>
-            </a:pPr>
             <a:r>
               <a:rPr lang="en-US" sz="1800" b="1" dirty="0">
                 <a:solidFill>
@@ -18558,9 +18165,6 @@
               </a:rPr>
               <a:t>正在</a:t>
             </a:r>
-            <a:pPr algn="l" indent="0" marL="0">
-              <a:buNone/>
-            </a:pPr>
             <a:r>
               <a:rPr lang="en-US" sz="1800" dirty="0">
                 <a:solidFill>
@@ -20428,6 +20032,194 @@
               </a:rPr>
               <a:t>🙊 </a:t>
             </a:r>
+            <a:r>
+              <a:rPr lang="en-US" sz="1100" b="1" i="1" dirty="0">
+                <a:solidFill>
+                  <a:srgbClr val="8B94A3"/>
+                </a:solidFill>
+                <a:latin typeface="Noto Serif SC" pitchFamily="34" charset="0"/>
+                <a:ea typeface="Noto Serif SC" pitchFamily="34" charset="-122"/>
+                <a:cs typeface="Noto Serif SC" pitchFamily="34" charset="-120"/>
+              </a:rPr>
+              <a:t>silent action mime</a:t>
+            </a:r>
+            <a:endParaRPr lang="en-US" sz="1400" dirty="0"/>
+          </a:p>
+        </p:txBody>
+      </p:sp>
+      <p:sp>
+        <p:nvSpPr>
+          <p:cNvPr id="20" name="Text 18"/>
+          <p:cNvSpPr/>
+          <p:nvPr/>
+        </p:nvSpPr>
+        <p:spPr>
+          <a:xfrm>
+            <a:off x="1152376" y="2887861"/>
+            <a:ext cx="4708981" cy="152400"/>
+          </a:xfrm>
+          <a:prstGeom prst="rect">
+            <a:avLst/>
+          </a:prstGeom>
+          <a:noFill/>
+          <a:ln/>
+        </p:spPr>
+        <p:txBody>
+          <a:bodyPr wrap="square" lIns="0" tIns="0" rIns="0" bIns="0" rtlCol="0" anchor="t"/>
+          <a:lstStyle/>
+          <a:p>
+            <a:pPr algn="l" indent="0" marL="0">
+              <a:buNone/>
+            </a:pPr>
+            <a:r>
+              <a:rPr lang="en-US" sz="850" i="1" dirty="0">
+                <a:solidFill>
+                  <a:srgbClr val="8B94A3"/>
+                </a:solidFill>
+                <a:latin typeface="Noto Sans SC" pitchFamily="34" charset="0"/>
+                <a:ea typeface="Noto Sans SC" pitchFamily="34" charset="-122"/>
+                <a:cs typeface="Noto Sans SC" pitchFamily="34" charset="-120"/>
+              </a:rPr>
+              <a:t>Act out the verb with no speaking</a:t>
+            </a:r>
+            <a:endParaRPr lang="en-US" sz="850" dirty="0"/>
+          </a:p>
+        </p:txBody>
+      </p:sp>
+      <p:sp>
+        <p:nvSpPr>
+          <p:cNvPr id="21" name="Text 19"/>
+          <p:cNvSpPr/>
+          <p:nvPr/>
+        </p:nvSpPr>
+        <p:spPr>
+          <a:xfrm>
+            <a:off x="746075" y="3167063"/>
+            <a:ext cx="279350" cy="279350"/>
+          </a:xfrm>
+          <a:prstGeom prst="roundRect">
+            <a:avLst>
+              <a:gd name="adj" fmla="val 327331"/>
+            </a:avLst>
+          </a:prstGeom>
+          <a:solidFill>
+            <a:srgbClr val="3A7D8C"/>
+          </a:solidFill>
+          <a:ln/>
+        </p:spPr>
+        <p:txBody>
+          <a:bodyPr wrap="square" rtlCol="0" anchor="ctr"/>
+          <a:lstStyle/>
+          <a:p>
+            <a:pPr indent="0" marL="0">
+              <a:buNone/>
+            </a:pPr>
+            <a:endParaRPr lang="en-US" dirty="0"/>
+          </a:p>
+        </p:txBody>
+      </p:sp>
+      <p:sp>
+        <p:nvSpPr>
+          <p:cNvPr id="22" name="Text 20"/>
+          <p:cNvSpPr/>
+          <p:nvPr/>
+        </p:nvSpPr>
+        <p:spPr>
+          <a:xfrm>
+            <a:off x="839837" y="3216176"/>
+            <a:ext cx="93512" cy="180975"/>
+          </a:xfrm>
+          <a:prstGeom prst="rect">
+            <a:avLst/>
+          </a:prstGeom>
+          <a:noFill/>
+          <a:ln/>
+        </p:spPr>
+        <p:txBody>
+          <a:bodyPr wrap="square" lIns="0" tIns="0" rIns="0" bIns="0" rtlCol="0" anchor="t"/>
+          <a:lstStyle/>
+          <a:p>
+            <a:pPr algn="l" indent="0" marL="0">
+              <a:buNone/>
+            </a:pPr>
+            <a:r>
+              <a:rPr lang="en-US" sz="1000" b="1" dirty="0">
+                <a:solidFill>
+                  <a:srgbClr val="FFFFFF"/>
+                </a:solidFill>
+                <a:latin typeface="Noto Sans SC" pitchFamily="34" charset="0"/>
+                <a:ea typeface="Noto Sans SC" pitchFamily="34" charset="-122"/>
+                <a:cs typeface="Noto Sans SC" pitchFamily="34" charset="-120"/>
+              </a:rPr>
+              <a:t>B</a:t>
+            </a:r>
+            <a:endParaRPr lang="en-US" sz="1000" dirty="0"/>
+          </a:p>
+        </p:txBody>
+      </p:sp>
+      <p:sp>
+        <p:nvSpPr>
+          <p:cNvPr id="23" name="Text 21"/>
+          <p:cNvSpPr/>
+          <p:nvPr/>
+        </p:nvSpPr>
+        <p:spPr>
+          <a:xfrm>
+            <a:off x="1152376" y="3141762"/>
+            <a:ext cx="4708981" cy="123825"/>
+          </a:xfrm>
+          <a:prstGeom prst="rect">
+            <a:avLst/>
+          </a:prstGeom>
+          <a:noFill/>
+          <a:ln/>
+        </p:spPr>
+        <p:txBody>
+          <a:bodyPr wrap="square" lIns="0" tIns="0" rIns="0" bIns="0" rtlCol="0" anchor="t"/>
+          <a:lstStyle/>
+          <a:p>
+            <a:pPr algn="l" indent="0" marL="0">
+              <a:spcAft>
+                <a:spcPts val="300"/>
+              </a:spcAft>
+              <a:buNone/>
+            </a:pPr>
+            <a:r>
+              <a:rPr lang="en-US" sz="700" b="1" dirty="0">
+                <a:solidFill>
+                  <a:srgbClr val="3A7D8C"/>
+                </a:solidFill>
+                <a:latin typeface="Noto Sans SC" pitchFamily="34" charset="0"/>
+                <a:ea typeface="Noto Sans SC" pitchFamily="34" charset="-122"/>
+                <a:cs typeface="Noto Sans SC" pitchFamily="34" charset="-120"/>
+              </a:rPr>
+              <a:t>PARTNER B — asks</a:t>
+            </a:r>
+            <a:endParaRPr lang="en-US" sz="700" dirty="0"/>
+          </a:p>
+        </p:txBody>
+      </p:sp>
+      <p:sp>
+        <p:nvSpPr>
+          <p:cNvPr id="24" name="Text 22"/>
+          <p:cNvSpPr/>
+          <p:nvPr/>
+        </p:nvSpPr>
+        <p:spPr>
+          <a:xfrm>
+            <a:off x="1152376" y="3303687"/>
+            <a:ext cx="4708981" cy="231130"/>
+          </a:xfrm>
+          <a:prstGeom prst="rect">
+            <a:avLst/>
+          </a:prstGeom>
+          <a:noFill/>
+          <a:ln/>
+        </p:spPr>
+        <p:txBody>
+          <a:bodyPr wrap="square" lIns="0" tIns="0" rIns="0" bIns="0" rtlCol="0" anchor="t"/>
+          <a:lstStyle/>
+          <a:p>
             <a:pPr algn="l" indent="0" marL="0">
               <a:lnSpc>
                 <a:spcPts val="1820"/>
@@ -20438,15 +20230,59 @@
               <a:buNone/>
             </a:pPr>
             <a:r>
-              <a:rPr lang="en-US" sz="1100" b="1" i="1" dirty="0">
-                <a:solidFill>
-                  <a:srgbClr val="8B94A3"/>
+              <a:rPr lang="en-US" sz="1400" dirty="0">
+                <a:solidFill>
+                  <a:srgbClr val="1E2A38"/>
                 </a:solidFill>
                 <a:latin typeface="Noto Serif SC" pitchFamily="34" charset="0"/>
                 <a:ea typeface="Noto Serif SC" pitchFamily="34" charset="-122"/>
                 <a:cs typeface="Noto Serif SC" pitchFamily="34" charset="-120"/>
               </a:rPr>
-              <a:t>silent action mime</a:t>
+              <a:t>你</a:t>
+            </a:r>
+            <a:r>
+              <a:rPr lang="en-US" sz="1400" b="1" dirty="0">
+                <a:solidFill>
+                  <a:srgbClr val="3A7D8C"/>
+                </a:solidFill>
+                <a:latin typeface="Noto Serif SC" pitchFamily="34" charset="0"/>
+                <a:ea typeface="Noto Serif SC" pitchFamily="34" charset="-122"/>
+                <a:cs typeface="Noto Serif SC" pitchFamily="34" charset="-120"/>
+              </a:rPr>
+              <a:t>正在</a:t>
+            </a:r>
+            <a:r>
+              <a:rPr lang="en-US" sz="1400" dirty="0">
+                <a:solidFill>
+                  <a:srgbClr val="1E2A38"/>
+                </a:solidFill>
+                <a:latin typeface="Noto Serif SC" pitchFamily="34" charset="0"/>
+                <a:ea typeface="Noto Serif SC" pitchFamily="34" charset="-122"/>
+                <a:cs typeface="Noto Serif SC" pitchFamily="34" charset="-120"/>
+              </a:rPr>
+              <a:t>______</a:t>
+            </a:r>
+            <a:r>
+              <a:rPr lang="en-US" sz="1400" b="1" dirty="0">
+                <a:solidFill>
+                  <a:srgbClr val="3A7D8C"/>
+                </a:solidFill>
+                <a:latin typeface="Noto Serif SC" pitchFamily="34" charset="0"/>
+                <a:ea typeface="Noto Serif SC" pitchFamily="34" charset="-122"/>
+                <a:cs typeface="Noto Serif SC" pitchFamily="34" charset="-120"/>
+              </a:rPr>
+              <a:t>吗</a:t>
+            </a:r>
+            <a:r>
+              <a:rPr lang="en-US" sz="1400" dirty="0">
+                <a:solidFill>
+                  <a:srgbClr val="1E2A38"/>
+                </a:solidFill>
+                <a:latin typeface="Noto Serif SC" pitchFamily="34" charset="0"/>
+                <a:ea typeface="Noto Serif SC" pitchFamily="34" charset="-122"/>
+                <a:cs typeface="Noto Serif SC" pitchFamily="34" charset="-120"/>
+              </a:rPr>
+              <a:t>？</a:t>
             </a:r>
             <a:endParaRPr lang="en-US" sz="1400" dirty="0"/>
           </a:p>
@@ -20454,13 +20290,58 @@
       </p:sp>
       <p:sp>
         <p:nvSpPr>
-          <p:cNvPr id="20" name="Text 18"/>
-          <p:cNvSpPr/>
-          <p:nvPr/>
-        </p:nvSpPr>
-        <p:spPr>
-          <a:xfrm>
-            <a:off x="1152376" y="2887861"/>
+          <p:cNvPr id="25" name="Text 23"/>
+          <p:cNvSpPr/>
+          <p:nvPr/>
+        </p:nvSpPr>
+        <p:spPr>
+          <a:xfrm>
+            <a:off x="1152376" y="3560118"/>
+            <a:ext cx="4708981" cy="181570"/>
+          </a:xfrm>
+          <a:prstGeom prst="rect">
+            <a:avLst/>
+          </a:prstGeom>
+          <a:noFill/>
+          <a:ln/>
+        </p:spPr>
+        <p:txBody>
+          <a:bodyPr wrap="square" lIns="0" tIns="0" rIns="0" bIns="0" rtlCol="0" anchor="t"/>
+          <a:lstStyle/>
+          <a:p>
+            <a:pPr algn="l" indent="0" marL="0">
+              <a:lnSpc>
+                <a:spcPts val="1430"/>
+              </a:lnSpc>
+              <a:spcAft>
+                <a:spcPts val="200"/>
+              </a:spcAft>
+              <a:buNone/>
+            </a:pPr>
+            <a:r>
+              <a:rPr lang="en-US" sz="1100" b="1" dirty="0">
+                <a:solidFill>
+                  <a:srgbClr val="1E2A38"/>
+                </a:solidFill>
+                <a:latin typeface="Noto Serif SC" pitchFamily="34" charset="0"/>
+                <a:ea typeface="Noto Serif SC" pitchFamily="34" charset="-122"/>
+                <a:cs typeface="Noto Serif SC" pitchFamily="34" charset="-120"/>
+              </a:rPr>
+              <a:t>或者：你在做什么？</a:t>
+            </a:r>
+            <a:endParaRPr lang="en-US" sz="1100" dirty="0"/>
+          </a:p>
+        </p:txBody>
+      </p:sp>
+      <p:sp>
+        <p:nvSpPr>
+          <p:cNvPr id="26" name="Text 24"/>
+          <p:cNvSpPr/>
+          <p:nvPr/>
+        </p:nvSpPr>
+        <p:spPr>
+          <a:xfrm>
+            <a:off x="1152376" y="3766989"/>
             <a:ext cx="4708981" cy="152400"/>
           </a:xfrm>
           <a:prstGeom prst="rect">
@@ -20485,7 +20366,7 @@
                 <a:ea typeface="Noto Sans SC" pitchFamily="34" charset="-122"/>
                 <a:cs typeface="Noto Sans SC" pitchFamily="34" charset="-120"/>
               </a:rPr>
-              <a:t>Act out the verb with no speaking</a:t>
+              <a:t>Are you [verb]-ing? / What are you doing?</a:t>
             </a:r>
             <a:endParaRPr lang="en-US" sz="850" dirty="0"/>
           </a:p>
@@ -20493,13 +20374,13 @@
       </p:sp>
       <p:sp>
         <p:nvSpPr>
-          <p:cNvPr id="21" name="Text 19"/>
-          <p:cNvSpPr/>
-          <p:nvPr/>
-        </p:nvSpPr>
-        <p:spPr>
-          <a:xfrm>
-            <a:off x="746075" y="3167063"/>
+          <p:cNvPr id="27" name="Text 25"/>
+          <p:cNvSpPr/>
+          <p:nvPr/>
+        </p:nvSpPr>
+        <p:spPr>
+          <a:xfrm>
+            <a:off x="746075" y="4046190"/>
             <a:ext cx="279350" cy="279350"/>
           </a:xfrm>
           <a:prstGeom prst="roundRect">
@@ -20508,7 +20389,7 @@
             </a:avLst>
           </a:prstGeom>
           <a:solidFill>
-            <a:srgbClr val="3A7D8C"/>
+            <a:srgbClr val="C8943E"/>
           </a:solidFill>
           <a:ln/>
         </p:spPr>
@@ -20525,14 +20406,14 @@
       </p:sp>
       <p:sp>
         <p:nvSpPr>
-          <p:cNvPr id="22" name="Text 20"/>
-          <p:cNvSpPr/>
-          <p:nvPr/>
-        </p:nvSpPr>
-        <p:spPr>
-          <a:xfrm>
-            <a:off x="839837" y="3216176"/>
-            <a:ext cx="93512" cy="180975"/>
+          <p:cNvPr id="28" name="Text 26"/>
+          <p:cNvSpPr/>
+          <p:nvPr/>
+        </p:nvSpPr>
+        <p:spPr>
+          <a:xfrm>
+            <a:off x="840284" y="4095304"/>
+            <a:ext cx="92601" cy="180975"/>
           </a:xfrm>
           <a:prstGeom prst="rect">
             <a:avLst/>
@@ -20556,7 +20437,7 @@
                 <a:ea typeface="Noto Sans SC" pitchFamily="34" charset="-122"/>
                 <a:cs typeface="Noto Sans SC" pitchFamily="34" charset="-120"/>
               </a:rPr>
-              <a:t>B</a:t>
+              <a:t>A</a:t>
             </a:r>
             <a:endParaRPr lang="en-US" sz="1000" dirty="0"/>
           </a:p>
@@ -20564,13 +20445,13 @@
       </p:sp>
       <p:sp>
         <p:nvSpPr>
-          <p:cNvPr id="23" name="Text 21"/>
-          <p:cNvSpPr/>
-          <p:nvPr/>
-        </p:nvSpPr>
-        <p:spPr>
-          <a:xfrm>
-            <a:off x="1152376" y="3141762"/>
+          <p:cNvPr id="29" name="Text 27"/>
+          <p:cNvSpPr/>
+          <p:nvPr/>
+        </p:nvSpPr>
+        <p:spPr>
+          <a:xfrm>
+            <a:off x="1152376" y="4020889"/>
             <a:ext cx="4708981" cy="123825"/>
           </a:xfrm>
           <a:prstGeom prst="rect">
@@ -20592,13 +20473,13 @@
             <a:r>
               <a:rPr lang="en-US" sz="700" b="1" dirty="0">
                 <a:solidFill>
-                  <a:srgbClr val="3A7D8C"/>
-                </a:solidFill>
-                <a:latin typeface="Noto Sans SC" pitchFamily="34" charset="0"/>
-                <a:ea typeface="Noto Sans SC" pitchFamily="34" charset="-122"/>
-                <a:cs typeface="Noto Sans SC" pitchFamily="34" charset="-120"/>
-              </a:rPr>
-              <a:t>PARTNER B — asks</a:t>
+                  <a:srgbClr val="C8943E"/>
+                </a:solidFill>
+                <a:latin typeface="Noto Sans SC" pitchFamily="34" charset="0"/>
+                <a:ea typeface="Noto Sans SC" pitchFamily="34" charset="-122"/>
+                <a:cs typeface="Noto Sans SC" pitchFamily="34" charset="-120"/>
+              </a:rPr>
+              <a:t>PARTNER A — answers</a:t>
             </a:r>
             <a:endParaRPr lang="en-US" sz="700" dirty="0"/>
           </a:p>
@@ -20606,13 +20487,13 @@
       </p:sp>
       <p:sp>
         <p:nvSpPr>
-          <p:cNvPr id="24" name="Text 22"/>
-          <p:cNvSpPr/>
-          <p:nvPr/>
-        </p:nvSpPr>
-        <p:spPr>
-          <a:xfrm>
-            <a:off x="1152376" y="3303687"/>
+          <p:cNvPr id="30" name="Text 28"/>
+          <p:cNvSpPr/>
+          <p:nvPr/>
+        </p:nvSpPr>
+        <p:spPr>
+          <a:xfrm>
+            <a:off x="1152376" y="4182814"/>
             <a:ext cx="4708981" cy="231130"/>
           </a:xfrm>
           <a:prstGeom prst="rect">
@@ -20635,95 +20516,48 @@
               <a:buNone/>
             </a:pPr>
             <a:r>
-              <a:rPr lang="en-US" sz="1400" dirty="0">
-                <a:solidFill>
-                  <a:srgbClr val="1E2A38"/>
+              <a:rPr lang="en-US" sz="1400" b="1" dirty="0">
+                <a:solidFill>
+                  <a:srgbClr val="C8943E"/>
                 </a:solidFill>
                 <a:latin typeface="Noto Serif SC" pitchFamily="34" charset="0"/>
                 <a:ea typeface="Noto Serif SC" pitchFamily="34" charset="-122"/>
                 <a:cs typeface="Noto Serif SC" pitchFamily="34" charset="-120"/>
               </a:rPr>
-              <a:t>你</a:t>
-            </a:r>
-            <a:pPr algn="l" indent="0" marL="0">
-              <a:lnSpc>
-                <a:spcPts val="1820"/>
-              </a:lnSpc>
-              <a:spcAft>
-                <a:spcPts val="200"/>
-              </a:spcAft>
-              <a:buNone/>
-            </a:pPr>
-            <a:r>
-              <a:rPr lang="en-US" sz="1400" b="1" dirty="0">
-                <a:solidFill>
-                  <a:srgbClr val="3A7D8C"/>
+              <a:t>是的</a:t>
+            </a:r>
+            <a:r>
+              <a:rPr lang="en-US" sz="1400" dirty="0">
+                <a:solidFill>
+                  <a:srgbClr val="1E2A38"/>
                 </a:solidFill>
                 <a:latin typeface="Noto Serif SC" pitchFamily="34" charset="0"/>
                 <a:ea typeface="Noto Serif SC" pitchFamily="34" charset="-122"/>
                 <a:cs typeface="Noto Serif SC" pitchFamily="34" charset="-120"/>
               </a:rPr>
-              <a:t>正在</a:t>
-            </a:r>
-            <a:pPr algn="l" indent="0" marL="0">
-              <a:lnSpc>
-                <a:spcPts val="1820"/>
-              </a:lnSpc>
-              <a:spcAft>
-                <a:spcPts val="200"/>
-              </a:spcAft>
-              <a:buNone/>
-            </a:pPr>
-            <a:r>
-              <a:rPr lang="en-US" sz="1400" dirty="0">
-                <a:solidFill>
-                  <a:srgbClr val="1E2A38"/>
+              <a:t>，我</a:t>
+            </a:r>
+            <a:r>
+              <a:rPr lang="en-US" sz="1400" b="1" dirty="0">
+                <a:solidFill>
+                  <a:srgbClr val="C8943E"/>
                 </a:solidFill>
                 <a:latin typeface="Noto Serif SC" pitchFamily="34" charset="0"/>
                 <a:ea typeface="Noto Serif SC" pitchFamily="34" charset="-122"/>
                 <a:cs typeface="Noto Serif SC" pitchFamily="34" charset="-120"/>
               </a:rPr>
-              <a:t>______</a:t>
-            </a:r>
-            <a:pPr algn="l" indent="0" marL="0">
-              <a:lnSpc>
-                <a:spcPts val="1820"/>
-              </a:lnSpc>
-              <a:spcAft>
-                <a:spcPts val="200"/>
-              </a:spcAft>
-              <a:buNone/>
-            </a:pPr>
-            <a:r>
-              <a:rPr lang="en-US" sz="1400" b="1" dirty="0">
-                <a:solidFill>
-                  <a:srgbClr val="3A7D8C"/>
+              <a:t>正在</a:t>
+            </a:r>
+            <a:r>
+              <a:rPr lang="en-US" sz="1400" dirty="0">
+                <a:solidFill>
+                  <a:srgbClr val="1E2A38"/>
                 </a:solidFill>
                 <a:latin typeface="Noto Serif SC" pitchFamily="34" charset="0"/>
                 <a:ea typeface="Noto Serif SC" pitchFamily="34" charset="-122"/>
                 <a:cs typeface="Noto Serif SC" pitchFamily="34" charset="-120"/>
               </a:rPr>
-              <a:t>吗</a:t>
-            </a:r>
-            <a:pPr algn="l" indent="0" marL="0">
-              <a:lnSpc>
-                <a:spcPts val="1820"/>
-              </a:lnSpc>
-              <a:spcAft>
-                <a:spcPts val="200"/>
-              </a:spcAft>
-              <a:buNone/>
-            </a:pPr>
-            <a:r>
-              <a:rPr lang="en-US" sz="1400" dirty="0">
-                <a:solidFill>
-                  <a:srgbClr val="1E2A38"/>
-                </a:solidFill>
-                <a:latin typeface="Noto Serif SC" pitchFamily="34" charset="0"/>
-                <a:ea typeface="Noto Serif SC" pitchFamily="34" charset="-122"/>
-                <a:cs typeface="Noto Serif SC" pitchFamily="34" charset="-120"/>
-              </a:rPr>
-              <a:t>？</a:t>
+              <a:t>______。</a:t>
             </a:r>
             <a:endParaRPr lang="en-US" sz="1400" dirty="0"/>
           </a:p>
@@ -20731,13 +20565,13 @@
       </p:sp>
       <p:sp>
         <p:nvSpPr>
-          <p:cNvPr id="25" name="Text 23"/>
-          <p:cNvSpPr/>
-          <p:nvPr/>
-        </p:nvSpPr>
-        <p:spPr>
-          <a:xfrm>
-            <a:off x="1152376" y="3560118"/>
+          <p:cNvPr id="31" name="Text 29"/>
+          <p:cNvSpPr/>
+          <p:nvPr/>
+        </p:nvSpPr>
+        <p:spPr>
+          <a:xfrm>
+            <a:off x="1152376" y="4439245"/>
             <a:ext cx="4708981" cy="181570"/>
           </a:xfrm>
           <a:prstGeom prst="rect">
@@ -20760,7 +20594,7 @@
               <a:buNone/>
             </a:pPr>
             <a:r>
-              <a:rPr lang="en-US" sz="1100" b="1" dirty="0">
+              <a:rPr lang="en-US" sz="1100" dirty="0">
                 <a:solidFill>
                   <a:srgbClr val="1E2A38"/>
                 </a:solidFill>
@@ -20768,196 +20602,10 @@
                 <a:ea typeface="Noto Serif SC" pitchFamily="34" charset="-122"/>
                 <a:cs typeface="Noto Serif SC" pitchFamily="34" charset="-120"/>
               </a:rPr>
-              <a:t>或者：你在做什么？</a:t>
-            </a:r>
-            <a:endParaRPr lang="en-US" sz="1100" dirty="0"/>
-          </a:p>
-        </p:txBody>
-      </p:sp>
-      <p:sp>
-        <p:nvSpPr>
-          <p:cNvPr id="26" name="Text 24"/>
-          <p:cNvSpPr/>
-          <p:nvPr/>
-        </p:nvSpPr>
-        <p:spPr>
-          <a:xfrm>
-            <a:off x="1152376" y="3766989"/>
-            <a:ext cx="4708981" cy="152400"/>
-          </a:xfrm>
-          <a:prstGeom prst="rect">
-            <a:avLst/>
-          </a:prstGeom>
-          <a:noFill/>
-          <a:ln/>
-        </p:spPr>
-        <p:txBody>
-          <a:bodyPr wrap="square" lIns="0" tIns="0" rIns="0" bIns="0" rtlCol="0" anchor="t"/>
-          <a:lstStyle/>
-          <a:p>
-            <a:pPr algn="l" indent="0" marL="0">
-              <a:buNone/>
-            </a:pPr>
-            <a:r>
-              <a:rPr lang="en-US" sz="850" i="1" dirty="0">
-                <a:solidFill>
-                  <a:srgbClr val="8B94A3"/>
-                </a:solidFill>
-                <a:latin typeface="Noto Sans SC" pitchFamily="34" charset="0"/>
-                <a:ea typeface="Noto Sans SC" pitchFamily="34" charset="-122"/>
-                <a:cs typeface="Noto Sans SC" pitchFamily="34" charset="-120"/>
-              </a:rPr>
-              <a:t>Are you [verb]-ing? / What are you doing?</a:t>
-            </a:r>
-            <a:endParaRPr lang="en-US" sz="850" dirty="0"/>
-          </a:p>
-        </p:txBody>
-      </p:sp>
-      <p:sp>
-        <p:nvSpPr>
-          <p:cNvPr id="27" name="Text 25"/>
-          <p:cNvSpPr/>
-          <p:nvPr/>
-        </p:nvSpPr>
-        <p:spPr>
-          <a:xfrm>
-            <a:off x="746075" y="4046190"/>
-            <a:ext cx="279350" cy="279350"/>
-          </a:xfrm>
-          <a:prstGeom prst="roundRect">
-            <a:avLst>
-              <a:gd name="adj" fmla="val 327331"/>
-            </a:avLst>
-          </a:prstGeom>
-          <a:solidFill>
-            <a:srgbClr val="C8943E"/>
-          </a:solidFill>
-          <a:ln/>
-        </p:spPr>
-        <p:txBody>
-          <a:bodyPr wrap="square" rtlCol="0" anchor="ctr"/>
-          <a:lstStyle/>
-          <a:p>
-            <a:pPr indent="0" marL="0">
-              <a:buNone/>
-            </a:pPr>
-            <a:endParaRPr lang="en-US" dirty="0"/>
-          </a:p>
-        </p:txBody>
-      </p:sp>
-      <p:sp>
-        <p:nvSpPr>
-          <p:cNvPr id="28" name="Text 26"/>
-          <p:cNvSpPr/>
-          <p:nvPr/>
-        </p:nvSpPr>
-        <p:spPr>
-          <a:xfrm>
-            <a:off x="840284" y="4095304"/>
-            <a:ext cx="92601" cy="180975"/>
-          </a:xfrm>
-          <a:prstGeom prst="rect">
-            <a:avLst/>
-          </a:prstGeom>
-          <a:noFill/>
-          <a:ln/>
-        </p:spPr>
-        <p:txBody>
-          <a:bodyPr wrap="square" lIns="0" tIns="0" rIns="0" bIns="0" rtlCol="0" anchor="t"/>
-          <a:lstStyle/>
-          <a:p>
-            <a:pPr algn="l" indent="0" marL="0">
-              <a:buNone/>
-            </a:pPr>
-            <a:r>
-              <a:rPr lang="en-US" sz="1000" b="1" dirty="0">
-                <a:solidFill>
-                  <a:srgbClr val="FFFFFF"/>
-                </a:solidFill>
-                <a:latin typeface="Noto Sans SC" pitchFamily="34" charset="0"/>
-                <a:ea typeface="Noto Sans SC" pitchFamily="34" charset="-122"/>
-                <a:cs typeface="Noto Sans SC" pitchFamily="34" charset="-120"/>
-              </a:rPr>
-              <a:t>A</a:t>
-            </a:r>
-            <a:endParaRPr lang="en-US" sz="1000" dirty="0"/>
-          </a:p>
-        </p:txBody>
-      </p:sp>
-      <p:sp>
-        <p:nvSpPr>
-          <p:cNvPr id="29" name="Text 27"/>
-          <p:cNvSpPr/>
-          <p:nvPr/>
-        </p:nvSpPr>
-        <p:spPr>
-          <a:xfrm>
-            <a:off x="1152376" y="4020889"/>
-            <a:ext cx="4708981" cy="123825"/>
-          </a:xfrm>
-          <a:prstGeom prst="rect">
-            <a:avLst/>
-          </a:prstGeom>
-          <a:noFill/>
-          <a:ln/>
-        </p:spPr>
-        <p:txBody>
-          <a:bodyPr wrap="square" lIns="0" tIns="0" rIns="0" bIns="0" rtlCol="0" anchor="t"/>
-          <a:lstStyle/>
-          <a:p>
-            <a:pPr algn="l" indent="0" marL="0">
-              <a:spcAft>
-                <a:spcPts val="300"/>
-              </a:spcAft>
-              <a:buNone/>
-            </a:pPr>
-            <a:r>
-              <a:rPr lang="en-US" sz="700" b="1" dirty="0">
-                <a:solidFill>
-                  <a:srgbClr val="C8943E"/>
-                </a:solidFill>
-                <a:latin typeface="Noto Sans SC" pitchFamily="34" charset="0"/>
-                <a:ea typeface="Noto Sans SC" pitchFamily="34" charset="-122"/>
-                <a:cs typeface="Noto Sans SC" pitchFamily="34" charset="-120"/>
-              </a:rPr>
-              <a:t>PARTNER A — answers</a:t>
-            </a:r>
-            <a:endParaRPr lang="en-US" sz="700" dirty="0"/>
-          </a:p>
-        </p:txBody>
-      </p:sp>
-      <p:sp>
-        <p:nvSpPr>
-          <p:cNvPr id="30" name="Text 28"/>
-          <p:cNvSpPr/>
-          <p:nvPr/>
-        </p:nvSpPr>
-        <p:spPr>
-          <a:xfrm>
-            <a:off x="1152376" y="4182814"/>
-            <a:ext cx="4708981" cy="231130"/>
-          </a:xfrm>
-          <a:prstGeom prst="rect">
-            <a:avLst/>
-          </a:prstGeom>
-          <a:noFill/>
-          <a:ln/>
-        </p:spPr>
-        <p:txBody>
-          <a:bodyPr wrap="square" lIns="0" tIns="0" rIns="0" bIns="0" rtlCol="0" anchor="t"/>
-          <a:lstStyle/>
-          <a:p>
-            <a:pPr algn="l" indent="0" marL="0">
-              <a:lnSpc>
-                <a:spcPts val="1820"/>
-              </a:lnSpc>
-              <a:spcAft>
-                <a:spcPts val="200"/>
-              </a:spcAft>
-              <a:buNone/>
-            </a:pPr>
-            <a:r>
-              <a:rPr lang="en-US" sz="1400" b="1" dirty="0">
+              <a:t>或 </a:t>
+            </a:r>
+            <a:r>
+              <a:rPr lang="en-US" sz="1100" b="1" dirty="0">
                 <a:solidFill>
                   <a:srgbClr val="C8943E"/>
                 </a:solidFill>
@@ -20965,19 +20613,10 @@
                 <a:ea typeface="Noto Serif SC" pitchFamily="34" charset="-122"/>
                 <a:cs typeface="Noto Serif SC" pitchFamily="34" charset="-120"/>
               </a:rPr>
-              <a:t>是的</a:t>
-            </a:r>
-            <a:pPr algn="l" indent="0" marL="0">
-              <a:lnSpc>
-                <a:spcPts val="1820"/>
-              </a:lnSpc>
-              <a:spcAft>
-                <a:spcPts val="200"/>
-              </a:spcAft>
-              <a:buNone/>
-            </a:pPr>
-            <a:r>
-              <a:rPr lang="en-US" sz="1400" dirty="0">
+              <a:t>不是</a:t>
+            </a:r>
+            <a:r>
+              <a:rPr lang="en-US" sz="1100" dirty="0">
                 <a:solidFill>
                   <a:srgbClr val="1E2A38"/>
                 </a:solidFill>
@@ -20987,17 +20626,8 @@
               </a:rPr>
               <a:t>，我</a:t>
             </a:r>
-            <a:pPr algn="l" indent="0" marL="0">
-              <a:lnSpc>
-                <a:spcPts val="1820"/>
-              </a:lnSpc>
-              <a:spcAft>
-                <a:spcPts val="200"/>
-              </a:spcAft>
-              <a:buNone/>
-            </a:pPr>
-            <a:r>
-              <a:rPr lang="en-US" sz="1400" b="1" dirty="0">
+            <a:r>
+              <a:rPr lang="en-US" sz="1100" b="1" dirty="0">
                 <a:solidFill>
                   <a:srgbClr val="C8943E"/>
                 </a:solidFill>
@@ -21007,140 +20637,6 @@
               </a:rPr>
               <a:t>正在</a:t>
             </a:r>
-            <a:pPr algn="l" indent="0" marL="0">
-              <a:lnSpc>
-                <a:spcPts val="1820"/>
-              </a:lnSpc>
-              <a:spcAft>
-                <a:spcPts val="200"/>
-              </a:spcAft>
-              <a:buNone/>
-            </a:pPr>
-            <a:r>
-              <a:rPr lang="en-US" sz="1400" dirty="0">
-                <a:solidFill>
-                  <a:srgbClr val="1E2A38"/>
-                </a:solidFill>
-                <a:latin typeface="Noto Serif SC" pitchFamily="34" charset="0"/>
-                <a:ea typeface="Noto Serif SC" pitchFamily="34" charset="-122"/>
-                <a:cs typeface="Noto Serif SC" pitchFamily="34" charset="-120"/>
-              </a:rPr>
-              <a:t>______。</a:t>
-            </a:r>
-            <a:endParaRPr lang="en-US" sz="1400" dirty="0"/>
-          </a:p>
-        </p:txBody>
-      </p:sp>
-      <p:sp>
-        <p:nvSpPr>
-          <p:cNvPr id="31" name="Text 29"/>
-          <p:cNvSpPr/>
-          <p:nvPr/>
-        </p:nvSpPr>
-        <p:spPr>
-          <a:xfrm>
-            <a:off x="1152376" y="4439245"/>
-            <a:ext cx="4708981" cy="181570"/>
-          </a:xfrm>
-          <a:prstGeom prst="rect">
-            <a:avLst/>
-          </a:prstGeom>
-          <a:noFill/>
-          <a:ln/>
-        </p:spPr>
-        <p:txBody>
-          <a:bodyPr wrap="square" lIns="0" tIns="0" rIns="0" bIns="0" rtlCol="0" anchor="t"/>
-          <a:lstStyle/>
-          <a:p>
-            <a:pPr algn="l" indent="0" marL="0">
-              <a:lnSpc>
-                <a:spcPts val="1430"/>
-              </a:lnSpc>
-              <a:spcAft>
-                <a:spcPts val="200"/>
-              </a:spcAft>
-              <a:buNone/>
-            </a:pPr>
-            <a:r>
-              <a:rPr lang="en-US" sz="1100" dirty="0">
-                <a:solidFill>
-                  <a:srgbClr val="1E2A38"/>
-                </a:solidFill>
-                <a:latin typeface="Noto Serif SC" pitchFamily="34" charset="0"/>
-                <a:ea typeface="Noto Serif SC" pitchFamily="34" charset="-122"/>
-                <a:cs typeface="Noto Serif SC" pitchFamily="34" charset="-120"/>
-              </a:rPr>
-              <a:t>或 </a:t>
-            </a:r>
-            <a:pPr algn="l" indent="0" marL="0">
-              <a:lnSpc>
-                <a:spcPts val="1430"/>
-              </a:lnSpc>
-              <a:spcAft>
-                <a:spcPts val="200"/>
-              </a:spcAft>
-              <a:buNone/>
-            </a:pPr>
-            <a:r>
-              <a:rPr lang="en-US" sz="1100" b="1" dirty="0">
-                <a:solidFill>
-                  <a:srgbClr val="C8943E"/>
-                </a:solidFill>
-                <a:latin typeface="Noto Serif SC" pitchFamily="34" charset="0"/>
-                <a:ea typeface="Noto Serif SC" pitchFamily="34" charset="-122"/>
-                <a:cs typeface="Noto Serif SC" pitchFamily="34" charset="-120"/>
-              </a:rPr>
-              <a:t>不是</a:t>
-            </a:r>
-            <a:pPr algn="l" indent="0" marL="0">
-              <a:lnSpc>
-                <a:spcPts val="1430"/>
-              </a:lnSpc>
-              <a:spcAft>
-                <a:spcPts val="200"/>
-              </a:spcAft>
-              <a:buNone/>
-            </a:pPr>
-            <a:r>
-              <a:rPr lang="en-US" sz="1100" dirty="0">
-                <a:solidFill>
-                  <a:srgbClr val="1E2A38"/>
-                </a:solidFill>
-                <a:latin typeface="Noto Serif SC" pitchFamily="34" charset="0"/>
-                <a:ea typeface="Noto Serif SC" pitchFamily="34" charset="-122"/>
-                <a:cs typeface="Noto Serif SC" pitchFamily="34" charset="-120"/>
-              </a:rPr>
-              <a:t>，我</a:t>
-            </a:r>
-            <a:pPr algn="l" indent="0" marL="0">
-              <a:lnSpc>
-                <a:spcPts val="1430"/>
-              </a:lnSpc>
-              <a:spcAft>
-                <a:spcPts val="200"/>
-              </a:spcAft>
-              <a:buNone/>
-            </a:pPr>
-            <a:r>
-              <a:rPr lang="en-US" sz="1100" b="1" dirty="0">
-                <a:solidFill>
-                  <a:srgbClr val="C8943E"/>
-                </a:solidFill>
-                <a:latin typeface="Noto Serif SC" pitchFamily="34" charset="0"/>
-                <a:ea typeface="Noto Serif SC" pitchFamily="34" charset="-122"/>
-                <a:cs typeface="Noto Serif SC" pitchFamily="34" charset="-120"/>
-              </a:rPr>
-              <a:t>正在</a:t>
-            </a:r>
-            <a:pPr algn="l" indent="0" marL="0">
-              <a:lnSpc>
-                <a:spcPts val="1430"/>
-              </a:lnSpc>
-              <a:spcAft>
-                <a:spcPts val="200"/>
-              </a:spcAft>
-              <a:buNone/>
-            </a:pPr>
             <a:r>
               <a:rPr lang="en-US" sz="1100" dirty="0">
                 <a:solidFill>
@@ -21457,12 +20953,6 @@
               </a:rPr>
               <a:t>你</a:t>
             </a:r>
-            <a:pPr algn="l" indent="0" marL="0">
-              <a:spcAft>
-                <a:spcPts val="200"/>
-              </a:spcAft>
-              <a:buNone/>
-            </a:pPr>
             <a:r>
               <a:rPr lang="en-US" sz="1400" b="1" dirty="0">
                 <a:solidFill>
@@ -21474,12 +20964,6 @@
               </a:rPr>
               <a:t>正在</a:t>
             </a:r>
-            <a:pPr algn="l" indent="0" marL="0">
-              <a:spcAft>
-                <a:spcPts val="200"/>
-              </a:spcAft>
-              <a:buNone/>
-            </a:pPr>
             <a:r>
               <a:rPr lang="en-US" sz="1400" dirty="0">
                 <a:solidFill>
@@ -21491,12 +20975,6 @@
               </a:rPr>
               <a:t>______</a:t>
             </a:r>
-            <a:pPr algn="l" indent="0" marL="0">
-              <a:spcAft>
-                <a:spcPts val="200"/>
-              </a:spcAft>
-              <a:buNone/>
-            </a:pPr>
             <a:r>
               <a:rPr lang="en-US" sz="1400" b="1" dirty="0">
                 <a:solidFill>
@@ -21508,12 +20986,6 @@
               </a:rPr>
               <a:t>吗</a:t>
             </a:r>
-            <a:pPr algn="l" indent="0" marL="0">
-              <a:spcAft>
-                <a:spcPts val="200"/>
-              </a:spcAft>
-              <a:buNone/>
-            </a:pPr>
             <a:r>
               <a:rPr lang="en-US" sz="1400" dirty="0">
                 <a:solidFill>
@@ -21835,12 +21307,6 @@
               </a:rPr>
               <a:t>是的</a:t>
             </a:r>
-            <a:pPr algn="l" indent="0" marL="0">
-              <a:spcAft>
-                <a:spcPts val="200"/>
-              </a:spcAft>
-              <a:buNone/>
-            </a:pPr>
             <a:r>
               <a:rPr lang="en-US" sz="1400" dirty="0">
                 <a:solidFill>
@@ -21852,12 +21318,6 @@
               </a:rPr>
               <a:t>，我</a:t>
             </a:r>
-            <a:pPr algn="l" indent="0" marL="0">
-              <a:spcAft>
-                <a:spcPts val="200"/>
-              </a:spcAft>
-              <a:buNone/>
-            </a:pPr>
             <a:r>
               <a:rPr lang="en-US" sz="1400" b="1" dirty="0">
                 <a:solidFill>
@@ -21869,12 +21329,6 @@
               </a:rPr>
               <a:t>正在</a:t>
             </a:r>
-            <a:pPr algn="l" indent="0" marL="0">
-              <a:spcAft>
-                <a:spcPts val="200"/>
-              </a:spcAft>
-              <a:buNone/>
-            </a:pPr>
             <a:r>
               <a:rPr lang="en-US" sz="1400" dirty="0">
                 <a:solidFill>
@@ -22041,12 +21495,6 @@
               </a:rPr>
               <a:t>不是</a:t>
             </a:r>
-            <a:pPr algn="l" indent="0" marL="0">
-              <a:spcAft>
-                <a:spcPts val="200"/>
-              </a:spcAft>
-              <a:buNone/>
-            </a:pPr>
             <a:r>
               <a:rPr lang="en-US" sz="1400" dirty="0">
                 <a:solidFill>
@@ -22058,12 +21506,6 @@
               </a:rPr>
               <a:t>，我</a:t>
             </a:r>
-            <a:pPr algn="l" indent="0" marL="0">
-              <a:spcAft>
-                <a:spcPts val="200"/>
-              </a:spcAft>
-              <a:buNone/>
-            </a:pPr>
             <a:r>
               <a:rPr lang="en-US" sz="1400" b="1" dirty="0">
                 <a:solidFill>
@@ -22075,12 +21517,6 @@
               </a:rPr>
               <a:t>正在</a:t>
             </a:r>
-            <a:pPr algn="l" indent="0" marL="0">
-              <a:spcAft>
-                <a:spcPts val="200"/>
-              </a:spcAft>
-              <a:buNone/>
-            </a:pPr>
             <a:r>
               <a:rPr lang="en-US" sz="1400" dirty="0">
                 <a:solidFill>
